--- a/Prezentacja_szkolenie_druk_3D.pptx
+++ b/Prezentacja_szkolenie_druk_3D.pptx
@@ -108,6 +108,11 @@
       </a:defRPr>
     </a:lvl9pPr>
   </p:defaultTextStyle>
+  <p:extLst>
+    <p:ext uri="{EFAFB233-063F-42B5-8137-9DF3F51BA10A}">
+      <p15:sldGuideLst xmlns:p15="http://schemas.microsoft.com/office/powerpoint/2012/main"/>
+    </p:ext>
+  </p:extLst>
 </p:presentation>
 </file>
 
@@ -3272,6 +3277,13 @@
               <a:schemeClr val="lt1"/>
             </a:fontRef>
           </p:style>
+          <p:txBody>
+            <a:bodyPr/>
+            <a:lstStyle/>
+            <a:p>
+              <a:endParaRPr lang="pl-PL"/>
+            </a:p>
+          </p:txBody>
         </p:sp>
         <p:cxnSp>
           <p:nvCxnSpPr>
@@ -3409,6 +3421,13 @@
               <a:schemeClr val="lt1"/>
             </a:fontRef>
           </p:style>
+          <p:txBody>
+            <a:bodyPr/>
+            <a:lstStyle/>
+            <a:p>
+              <a:endParaRPr lang="pl-PL"/>
+            </a:p>
+          </p:txBody>
         </p:sp>
         <p:sp>
           <p:nvSpPr>
@@ -3472,6 +3491,13 @@
               <a:schemeClr val="lt1"/>
             </a:fontRef>
           </p:style>
+          <p:txBody>
+            <a:bodyPr/>
+            <a:lstStyle/>
+            <a:p>
+              <a:endParaRPr lang="pl-PL"/>
+            </a:p>
+          </p:txBody>
         </p:sp>
         <p:sp>
           <p:nvSpPr>
@@ -3514,6 +3540,13 @@
               <a:schemeClr val="lt1"/>
             </a:fontRef>
           </p:style>
+          <p:txBody>
+            <a:bodyPr/>
+            <a:lstStyle/>
+            <a:p>
+              <a:endParaRPr lang="pl-PL"/>
+            </a:p>
+          </p:txBody>
         </p:sp>
         <p:sp>
           <p:nvSpPr>
@@ -3578,6 +3611,13 @@
               <a:schemeClr val="lt1"/>
             </a:fontRef>
           </p:style>
+          <p:txBody>
+            <a:bodyPr/>
+            <a:lstStyle/>
+            <a:p>
+              <a:endParaRPr lang="pl-PL"/>
+            </a:p>
+          </p:txBody>
         </p:sp>
         <p:sp>
           <p:nvSpPr>
@@ -3641,6 +3681,13 @@
               <a:schemeClr val="lt1"/>
             </a:fontRef>
           </p:style>
+          <p:txBody>
+            <a:bodyPr/>
+            <a:lstStyle/>
+            <a:p>
+              <a:endParaRPr lang="pl-PL"/>
+            </a:p>
+          </p:txBody>
         </p:sp>
         <p:sp>
           <p:nvSpPr>
@@ -3705,6 +3752,13 @@
               <a:schemeClr val="lt1"/>
             </a:fontRef>
           </p:style>
+          <p:txBody>
+            <a:bodyPr/>
+            <a:lstStyle/>
+            <a:p>
+              <a:endParaRPr lang="pl-PL"/>
+            </a:p>
+          </p:txBody>
         </p:sp>
         <p:sp>
           <p:nvSpPr>
@@ -3747,6 +3801,13 @@
               <a:schemeClr val="lt1"/>
             </a:fontRef>
           </p:style>
+          <p:txBody>
+            <a:bodyPr/>
+            <a:lstStyle/>
+            <a:p>
+              <a:endParaRPr lang="pl-PL"/>
+            </a:p>
+          </p:txBody>
         </p:sp>
       </p:grpSp>
       <p:sp>
@@ -3924,7 +3985,7 @@
           <a:p>
             <a:fld id="{B7F43F2C-9C71-46F4-A64F-8B834FF3C5E0}" type="datetimeFigureOut">
               <a:rPr lang="pl-PL" smtClean="0"/>
-              <a:t>13.12.2023</a:t>
+              <a:t>09.02.2026</a:t>
             </a:fld>
             <a:endParaRPr lang="pl-PL"/>
           </a:p>
@@ -4175,7 +4236,7 @@
           <a:p>
             <a:fld id="{B7F43F2C-9C71-46F4-A64F-8B834FF3C5E0}" type="datetimeFigureOut">
               <a:rPr lang="pl-PL" smtClean="0"/>
-              <a:t>13.12.2023</a:t>
+              <a:t>09.02.2026</a:t>
             </a:fld>
             <a:endParaRPr lang="pl-PL"/>
           </a:p>
@@ -4489,7 +4550,7 @@
           <a:p>
             <a:fld id="{B7F43F2C-9C71-46F4-A64F-8B834FF3C5E0}" type="datetimeFigureOut">
               <a:rPr lang="pl-PL" smtClean="0"/>
-              <a:t>13.12.2023</a:t>
+              <a:t>09.02.2026</a:t>
             </a:fld>
             <a:endParaRPr lang="pl-PL"/>
           </a:p>
@@ -4822,7 +4883,7 @@
           <a:p>
             <a:fld id="{B7F43F2C-9C71-46F4-A64F-8B834FF3C5E0}" type="datetimeFigureOut">
               <a:rPr lang="pl-PL" smtClean="0"/>
-              <a:t>13.12.2023</a:t>
+              <a:t>09.02.2026</a:t>
             </a:fld>
             <a:endParaRPr lang="pl-PL"/>
           </a:p>
@@ -5136,7 +5197,7 @@
           <a:p>
             <a:fld id="{B7F43F2C-9C71-46F4-A64F-8B834FF3C5E0}" type="datetimeFigureOut">
               <a:rPr lang="pl-PL" smtClean="0"/>
-              <a:t>13.12.2023</a:t>
+              <a:t>09.02.2026</a:t>
             </a:fld>
             <a:endParaRPr lang="pl-PL"/>
           </a:p>
@@ -5529,7 +5590,7 @@
           <a:p>
             <a:fld id="{B7F43F2C-9C71-46F4-A64F-8B834FF3C5E0}" type="datetimeFigureOut">
               <a:rPr lang="pl-PL" smtClean="0"/>
-              <a:t>13.12.2023</a:t>
+              <a:t>09.02.2026</a:t>
             </a:fld>
             <a:endParaRPr lang="pl-PL"/>
           </a:p>
@@ -5699,7 +5760,7 @@
           <a:p>
             <a:fld id="{B7F43F2C-9C71-46F4-A64F-8B834FF3C5E0}" type="datetimeFigureOut">
               <a:rPr lang="pl-PL" smtClean="0"/>
-              <a:t>13.12.2023</a:t>
+              <a:t>09.02.2026</a:t>
             </a:fld>
             <a:endParaRPr lang="pl-PL"/>
           </a:p>
@@ -5879,7 +5940,7 @@
           <a:p>
             <a:fld id="{B7F43F2C-9C71-46F4-A64F-8B834FF3C5E0}" type="datetimeFigureOut">
               <a:rPr lang="pl-PL" smtClean="0"/>
-              <a:t>13.12.2023</a:t>
+              <a:t>09.02.2026</a:t>
             </a:fld>
             <a:endParaRPr lang="pl-PL"/>
           </a:p>
@@ -6049,7 +6110,7 @@
           <a:p>
             <a:fld id="{B7F43F2C-9C71-46F4-A64F-8B834FF3C5E0}" type="datetimeFigureOut">
               <a:rPr lang="pl-PL" smtClean="0"/>
-              <a:t>13.12.2023</a:t>
+              <a:t>09.02.2026</a:t>
             </a:fld>
             <a:endParaRPr lang="pl-PL"/>
           </a:p>
@@ -6296,7 +6357,7 @@
           <a:p>
             <a:fld id="{B7F43F2C-9C71-46F4-A64F-8B834FF3C5E0}" type="datetimeFigureOut">
               <a:rPr lang="pl-PL" smtClean="0"/>
-              <a:t>13.12.2023</a:t>
+              <a:t>09.02.2026</a:t>
             </a:fld>
             <a:endParaRPr lang="pl-PL"/>
           </a:p>
@@ -6528,7 +6589,7 @@
           <a:p>
             <a:fld id="{B7F43F2C-9C71-46F4-A64F-8B834FF3C5E0}" type="datetimeFigureOut">
               <a:rPr lang="pl-PL" smtClean="0"/>
-              <a:t>13.12.2023</a:t>
+              <a:t>09.02.2026</a:t>
             </a:fld>
             <a:endParaRPr lang="pl-PL"/>
           </a:p>
@@ -6902,7 +6963,7 @@
           <a:p>
             <a:fld id="{B7F43F2C-9C71-46F4-A64F-8B834FF3C5E0}" type="datetimeFigureOut">
               <a:rPr lang="pl-PL" smtClean="0"/>
-              <a:t>13.12.2023</a:t>
+              <a:t>09.02.2026</a:t>
             </a:fld>
             <a:endParaRPr lang="pl-PL"/>
           </a:p>
@@ -7025,7 +7086,7 @@
           <a:p>
             <a:fld id="{B7F43F2C-9C71-46F4-A64F-8B834FF3C5E0}" type="datetimeFigureOut">
               <a:rPr lang="pl-PL" smtClean="0"/>
-              <a:t>13.12.2023</a:t>
+              <a:t>09.02.2026</a:t>
             </a:fld>
             <a:endParaRPr lang="pl-PL"/>
           </a:p>
@@ -7120,7 +7181,7 @@
           <a:p>
             <a:fld id="{B7F43F2C-9C71-46F4-A64F-8B834FF3C5E0}" type="datetimeFigureOut">
               <a:rPr lang="pl-PL" smtClean="0"/>
-              <a:t>13.12.2023</a:t>
+              <a:t>09.02.2026</a:t>
             </a:fld>
             <a:endParaRPr lang="pl-PL"/>
           </a:p>
@@ -7375,7 +7436,7 @@
           <a:p>
             <a:fld id="{B7F43F2C-9C71-46F4-A64F-8B834FF3C5E0}" type="datetimeFigureOut">
               <a:rPr lang="pl-PL" smtClean="0"/>
-              <a:t>13.12.2023</a:t>
+              <a:t>09.02.2026</a:t>
             </a:fld>
             <a:endParaRPr lang="pl-PL"/>
           </a:p>
@@ -7680,7 +7741,7 @@
           <a:p>
             <a:fld id="{B7F43F2C-9C71-46F4-A64F-8B834FF3C5E0}" type="datetimeFigureOut">
               <a:rPr lang="pl-PL" smtClean="0"/>
-              <a:t>13.12.2023</a:t>
+              <a:t>09.02.2026</a:t>
             </a:fld>
             <a:endParaRPr lang="pl-PL"/>
           </a:p>
@@ -7871,6 +7932,13 @@
               <a:schemeClr val="lt1"/>
             </a:fontRef>
           </p:style>
+          <p:txBody>
+            <a:bodyPr/>
+            <a:lstStyle/>
+            <a:p>
+              <a:endParaRPr lang="pl-PL"/>
+            </a:p>
+          </p:txBody>
         </p:sp>
         <p:sp>
           <p:nvSpPr>
@@ -7934,6 +8002,13 @@
               <a:schemeClr val="lt1"/>
             </a:fontRef>
           </p:style>
+          <p:txBody>
+            <a:bodyPr/>
+            <a:lstStyle/>
+            <a:p>
+              <a:endParaRPr lang="pl-PL"/>
+            </a:p>
+          </p:txBody>
         </p:sp>
         <p:sp>
           <p:nvSpPr>
@@ -7976,6 +8051,13 @@
               <a:schemeClr val="lt1"/>
             </a:fontRef>
           </p:style>
+          <p:txBody>
+            <a:bodyPr/>
+            <a:lstStyle/>
+            <a:p>
+              <a:endParaRPr lang="pl-PL"/>
+            </a:p>
+          </p:txBody>
         </p:sp>
         <p:sp>
           <p:nvSpPr>
@@ -8040,6 +8122,13 @@
               <a:schemeClr val="lt1"/>
             </a:fontRef>
           </p:style>
+          <p:txBody>
+            <a:bodyPr/>
+            <a:lstStyle/>
+            <a:p>
+              <a:endParaRPr lang="pl-PL"/>
+            </a:p>
+          </p:txBody>
         </p:sp>
         <p:sp>
           <p:nvSpPr>
@@ -8103,6 +8192,13 @@
               <a:schemeClr val="lt1"/>
             </a:fontRef>
           </p:style>
+          <p:txBody>
+            <a:bodyPr/>
+            <a:lstStyle/>
+            <a:p>
+              <a:endParaRPr lang="pl-PL"/>
+            </a:p>
+          </p:txBody>
         </p:sp>
         <p:sp>
           <p:nvSpPr>
@@ -8167,6 +8263,13 @@
               <a:schemeClr val="lt1"/>
             </a:fontRef>
           </p:style>
+          <p:txBody>
+            <a:bodyPr/>
+            <a:lstStyle/>
+            <a:p>
+              <a:endParaRPr lang="pl-PL"/>
+            </a:p>
+          </p:txBody>
         </p:sp>
         <p:sp>
           <p:nvSpPr>
@@ -8209,6 +8312,13 @@
               <a:schemeClr val="lt1"/>
             </a:fontRef>
           </p:style>
+          <p:txBody>
+            <a:bodyPr/>
+            <a:lstStyle/>
+            <a:p>
+              <a:endParaRPr lang="pl-PL"/>
+            </a:p>
+          </p:txBody>
         </p:sp>
         <p:sp>
           <p:nvSpPr>
@@ -8250,6 +8360,13 @@
               <a:schemeClr val="lt1"/>
             </a:fontRef>
           </p:style>
+          <p:txBody>
+            <a:bodyPr/>
+            <a:lstStyle/>
+            <a:p>
+              <a:endParaRPr lang="pl-PL"/>
+            </a:p>
+          </p:txBody>
         </p:sp>
       </p:grpSp>
       <p:sp>
@@ -8382,7 +8499,7 @@
           <a:p>
             <a:fld id="{B7F43F2C-9C71-46F4-A64F-8B834FF3C5E0}" type="datetimeFigureOut">
               <a:rPr lang="pl-PL" smtClean="0"/>
-              <a:t>13.12.2023</a:t>
+              <a:t>09.02.2026</a:t>
             </a:fld>
             <a:endParaRPr lang="pl-PL"/>
           </a:p>
@@ -9488,13 +9605,8 @@
             </a:r>
             <a:r>
               <a:rPr lang="pl-PL" dirty="0"/>
-              <a:t>: </a:t>
-            </a:r>
-            <a:r>
-              <a:rPr lang="pl-PL" dirty="0" err="1"/>
-              <a:t>sapphire.local</a:t>
-            </a:r>
-            <a:endParaRPr lang="pl-PL" dirty="0"/>
+              <a:t>: 192.168.31.16</a:t>
+            </a:r>
           </a:p>
           <a:p>
             <a:r>
